--- a/Foundation_F1/Workshop/F1-W04_Apply_Workshop_L07-L08_The_School_Open_Day_Map.pptx
+++ b/Foundation_F1/Workshop/F1-W04_Apply_Workshop_L07-L08_The_School_Open_Day_Map.pptx
@@ -17599,6 +17599,19 @@
               <a:buNone/>
             </a:pPr>
             <a:r>
+              <a:rPr lang="en-US" sz="1150" b="1" dirty="0">
+                <a:solidFill>
+                  <a:srgbClr val="1B3B6F"/>
+                </a:solidFill>
+                <a:latin typeface="Calibri" pitchFamily="34" charset="0"/>
+                <a:cs typeface="Amiri" pitchFamily="2" charset="-78"/>
+              </a:rPr>
+              <a:t>‏</a:t>
+            </a:r>
+            <a:pPr algn="l" indent="0" marL="0">
+              <a:buNone/>
+            </a:pPr>
+            <a:r>
               <a:rPr lang="ar-SA" altLang="en-US" sz="1500" b="1" dirty="0">
                 <a:solidFill>
                   <a:srgbClr val="1B3B6F"/>
@@ -17620,7 +17633,7 @@
                 <a:latin typeface="Calibri" pitchFamily="34" charset="0"/>
                 <a:cs typeface="Amiri" pitchFamily="2" charset="-78"/>
               </a:rPr>
-              <a:t> = a small circle; </a:t>
+              <a:t>‏ = a small circle; ‏</a:t>
             </a:r>
             <a:pPr algn="l" indent="0" marL="0">
               <a:buNone/>
@@ -17647,7 +17660,7 @@
                 <a:latin typeface="Calibri" pitchFamily="34" charset="0"/>
                 <a:cs typeface="Amiri" pitchFamily="2" charset="-78"/>
               </a:rPr>
-              <a:t> = a dot (zero).</a:t>
+              <a:t>‏ = a dot (zero).</a:t>
             </a:r>
             <a:endParaRPr lang="en-US" sz="1150" dirty="0"/>
           </a:p>
@@ -19579,7 +19592,7 @@
                 <a:latin typeface="Calibri" pitchFamily="34" charset="0"/>
                 <a:cs typeface="Amiri" pitchFamily="2" charset="-78"/>
               </a:rPr>
-              <a:t>☐  All ten digits, clearly different (</a:t>
+              <a:t>☐  All ten digits, clearly different (‏</a:t>
             </a:r>
             <a:pPr algn="l" indent="0" marL="0">
               <a:buNone/>
@@ -19606,7 +19619,7 @@
                 <a:latin typeface="Calibri" pitchFamily="34" charset="0"/>
                 <a:cs typeface="Amiri" pitchFamily="2" charset="-78"/>
               </a:rPr>
-              <a:t> circle · </a:t>
+              <a:t>‏ circle · ‏</a:t>
             </a:r>
             <a:pPr algn="l" indent="0" marL="0">
               <a:buNone/>
@@ -19633,7 +19646,7 @@
                 <a:latin typeface="Calibri" pitchFamily="34" charset="0"/>
                 <a:cs typeface="Amiri" pitchFamily="2" charset="-78"/>
               </a:rPr>
-              <a:t> dot).</a:t>
+              <a:t>‏ dot).</a:t>
             </a:r>
             <a:endParaRPr lang="en-US" sz="1200" dirty="0"/>
           </a:p>
@@ -19709,7 +19722,7 @@
                 <a:latin typeface="Calibri" pitchFamily="34" charset="0"/>
                 <a:cs typeface="Amiri" pitchFamily="2" charset="-78"/>
               </a:rPr>
-              <a:t>☐  </a:t>
+              <a:t>☐  ‏</a:t>
             </a:r>
             <a:pPr algn="l" indent="0" marL="0">
               <a:buNone/>
@@ -19736,7 +19749,7 @@
                 <a:latin typeface="Calibri" pitchFamily="34" charset="0"/>
                 <a:cs typeface="Amiri" pitchFamily="2" charset="-78"/>
               </a:rPr>
-              <a:t> to </a:t>
+              <a:t>‏ to ‏</a:t>
             </a:r>
             <a:pPr algn="l" indent="0" marL="0">
               <a:buNone/>
@@ -19763,7 +19776,7 @@
                 <a:latin typeface="Calibri" pitchFamily="34" charset="0"/>
                 <a:cs typeface="Amiri" pitchFamily="2" charset="-78"/>
               </a:rPr>
-              <a:t> complete.</a:t>
+              <a:t>‏ complete.</a:t>
             </a:r>
             <a:endParaRPr lang="en-US" sz="1200" dirty="0"/>
           </a:p>
@@ -22901,7 +22914,7 @@
                 <a:latin typeface="Calibri" pitchFamily="34" charset="0"/>
                 <a:cs typeface="Amiri" pitchFamily="2" charset="-78"/>
               </a:rPr>
-              <a:t>write the digits clearly (</a:t>
+              <a:t>write the digits clearly (‏</a:t>
             </a:r>
             <a:pPr algn="l" indent="0" marL="0">
               <a:buNone/>
@@ -22928,7 +22941,7 @@
                 <a:latin typeface="Calibri" pitchFamily="34" charset="0"/>
                 <a:cs typeface="Amiri" pitchFamily="2" charset="-78"/>
               </a:rPr>
-              <a:t> circle · </a:t>
+              <a:t>‏ circle · ‏</a:t>
             </a:r>
             <a:pPr algn="l" indent="0" marL="0">
               <a:buNone/>
@@ -22955,7 +22968,7 @@
                 <a:latin typeface="Calibri" pitchFamily="34" charset="0"/>
                 <a:cs typeface="Amiri" pitchFamily="2" charset="-78"/>
               </a:rPr>
-              <a:t> dot)?</a:t>
+              <a:t>‏ dot)?</a:t>
             </a:r>
             <a:endParaRPr lang="en-US" sz="1100" dirty="0"/>
           </a:p>
@@ -23179,7 +23192,7 @@
                 <a:latin typeface="Calibri" pitchFamily="34" charset="0"/>
                 <a:cs typeface="Amiri" pitchFamily="2" charset="-78"/>
               </a:rPr>
-              <a:t>keep two-digit numbers in the right order (</a:t>
+              <a:t>keep two-digit numbers in the right order (‏</a:t>
             </a:r>
             <a:pPr algn="l" indent="0" marL="0">
               <a:buNone/>
@@ -23206,7 +23219,7 @@
                 <a:latin typeface="Calibri" pitchFamily="34" charset="0"/>
                 <a:cs typeface="Amiri" pitchFamily="2" charset="-78"/>
               </a:rPr>
-              <a:t> not </a:t>
+              <a:t>‏ not ‏</a:t>
             </a:r>
             <a:pPr algn="l" indent="0" marL="0">
               <a:buNone/>
@@ -23233,7 +23246,7 @@
                 <a:latin typeface="Calibri" pitchFamily="34" charset="0"/>
                 <a:cs typeface="Amiri" pitchFamily="2" charset="-78"/>
               </a:rPr>
-              <a:t>)?</a:t>
+              <a:t>‏)?</a:t>
             </a:r>
             <a:endParaRPr lang="en-US" sz="1100" dirty="0"/>
           </a:p>
@@ -23457,7 +23470,7 @@
                 <a:latin typeface="Calibri" pitchFamily="34" charset="0"/>
                 <a:cs typeface="Amiri" pitchFamily="2" charset="-78"/>
               </a:rPr>
-              <a:t>write </a:t>
+              <a:t>write ‏</a:t>
             </a:r>
             <a:pPr algn="l" indent="0" marL="0">
               <a:buNone/>
@@ -23484,7 +23497,7 @@
                 <a:latin typeface="Calibri" pitchFamily="34" charset="0"/>
                 <a:cs typeface="Amiri" pitchFamily="2" charset="-78"/>
               </a:rPr>
-              <a:t> to </a:t>
+              <a:t>‏ to ‏</a:t>
             </a:r>
             <a:pPr algn="l" indent="0" marL="0">
               <a:buNone/>
@@ -23511,7 +23524,7 @@
                 <a:latin typeface="Calibri" pitchFamily="34" charset="0"/>
                 <a:cs typeface="Amiri" pitchFamily="2" charset="-78"/>
               </a:rPr>
-              <a:t> without gaps?</a:t>
+              <a:t>‏ without gaps?</a:t>
             </a:r>
             <a:endParaRPr lang="en-US" sz="1100" dirty="0"/>
           </a:p>
